--- a/lectures/01/1회차_보는눈_슬라이드.pptx
+++ b/lectures/01/1회차_보는눈_슬라이드.pptx
@@ -163,13 +163,13 @@
   <p:extLst>
     <p:ext uri="{521415D9-36F7-43E2-AB2F-B90AF26B5E84}">
       <p14:sectionLst xmlns:p14="http://schemas.microsoft.com/office/powerpoint/2010/main">
-        <p14:section name="시작" id="{552794c5-fa98-c11e-f8a9-f3a84b6a739f}">
+        <p14:section name="시작" id="{681809f9-33a5-926a-5a56-dea91454a9c7}">
           <p14:sldIdLst>
             <p14:sldId id="256"/>
             <p14:sldId id="257"/>
           </p14:sldIdLst>
         </p14:section>
-        <p14:section name="1교시 OT와 과정 지도" id="{eaa7c7bc-ed9a-d1a1-edda-ef789e9e8f9b}">
+        <p14:section name="1교시 OT와 과정 지도" id="{ba285724-8ecd-474f-f853-bb6d818de5f9}">
           <p14:sldIdLst>
             <p14:sldId id="258"/>
             <p14:sldId id="259"/>
@@ -182,7 +182,7 @@
             <p14:sldId id="266"/>
           </p14:sldIdLst>
         </p14:section>
-        <p14:section name="2교시 영상 콘텐츠, 지금 어떻게 만들어지나" id="{f071a89b-faa3-5fcd-32a9-a15aeeb9dc6d}">
+        <p14:section name="2교시 영상 콘텐츠, 지금 어떻게 만들어지나" id="{d0b21bce-c9c1-09fa-d1fa-30d26253e793}">
           <p14:sldIdLst>
             <p14:sldId id="267"/>
             <p14:sldId id="268"/>
@@ -198,7 +198,7 @@
             <p14:sldId id="278"/>
           </p14:sldIdLst>
         </p14:section>
-        <p14:section name="3교시 카메라의 원리 ① 사진" id="{9440cb28-8a6c-8d15-23c8-8fd2aed5d2f0}">
+        <p14:section name="3교시 카메라의 원리 ① 사진" id="{a779d7b6-8b6a-1ffb-5693-b9f7e64c347b}">
           <p14:sldIdLst>
             <p14:sldId id="279"/>
             <p14:sldId id="280"/>
@@ -208,7 +208,7 @@
             <p14:sldId id="284"/>
           </p14:sldIdLst>
         </p14:section>
-        <p14:section name="4교시 카메라의 원리 ② 영상" id="{c0cefc88-9a74-b87c-3571-57230d3d45e9}">
+        <p14:section name="4교시 카메라의 원리 ② 영상" id="{9e2a3d4a-d341-f21c-89d0-eb1ab131ad5e}">
           <p14:sldIdLst>
             <p14:sldId id="285"/>
             <p14:sldId id="286"/>
@@ -219,7 +219,7 @@
             <p14:sldId id="291"/>
           </p14:sldIdLst>
         </p14:section>
-        <p14:section name="5교시 화면의 언어와 빛" id="{6200ee4c-8804-ff32-e284-ba04bb328747}">
+        <p14:section name="5교시 화면의 언어와 빛" id="{46bc4134-5035-96e2-b510-3cb109b82b46}">
           <p14:sldIdLst>
             <p14:sldId id="292"/>
             <p14:sldId id="293"/>
@@ -231,7 +231,7 @@
             <p14:sldId id="299"/>
           </p14:sldIdLst>
         </p14:section>
-        <p14:section name="6교시 움직임 · 컷 · 소리, 그리고 장비" id="{19a4c531-8e0f-276c-5304-c3b4f00402ea}">
+        <p14:section name="6교시 움직임 · 컷 · 소리, 그리고 장비" id="{70271db7-5903-fb10-bb6f-9d3257acab6f}">
           <p14:sldIdLst>
             <p14:sldId id="300"/>
             <p14:sldId id="301"/>
@@ -242,7 +242,7 @@
             <p14:sldId id="306"/>
           </p14:sldIdLst>
         </p14:section>
-        <p14:section name="7교시 촬영 리뷰와 공유" id="{b4a4f5dd-fdc3-bdbd-3a8c-b03f5ee1dcdd}">
+        <p14:section name="7교시 촬영 리뷰와 공유" id="{3fb8d0a8-316e-6d5a-af27-0b05e34b189d}">
           <p14:sldIdLst>
             <p14:sldId id="307"/>
             <p14:sldId id="308"/>
